--- a/преза.pptx
+++ b/преза.pptx
@@ -6,17 +6,19 @@
     <p:sldMasterId id="2147483650" r:id="rId2"/>
   </p:sldMasterIdLst>
   <p:notesMasterIdLst>
-    <p:notesMasterId r:id="rId8"/>
+    <p:notesMasterId r:id="rId10"/>
   </p:notesMasterIdLst>
   <p:handoutMasterIdLst>
-    <p:handoutMasterId r:id="rId9"/>
+    <p:handoutMasterId r:id="rId11"/>
   </p:handoutMasterIdLst>
   <p:sldIdLst>
     <p:sldId id="256" r:id="rId3"/>
     <p:sldId id="265" r:id="rId4"/>
-    <p:sldId id="262" r:id="rId5"/>
-    <p:sldId id="273" r:id="rId6"/>
-    <p:sldId id="286" r:id="rId7"/>
+    <p:sldId id="288" r:id="rId5"/>
+    <p:sldId id="262" r:id="rId6"/>
+    <p:sldId id="273" r:id="rId7"/>
+    <p:sldId id="286" r:id="rId8"/>
+    <p:sldId id="287" r:id="rId9"/>
   </p:sldIdLst>
   <p:sldSz cx="18288000" cy="10287000"/>
   <p:notesSz cx="10287000" cy="18288000"/>
@@ -5571,7 +5573,7 @@
           <a:p>
             <a:fld id="{BE5457D3-7643-445A-92AB-3517B3725C26}" type="datetimeFigureOut">
               <a:rPr lang="ru-RU" smtClean="0"/>
-              <a:t>29.05.2026</a:t>
+              <a:t>30.05.2026</a:t>
             </a:fld>
             <a:endParaRPr lang="ru-RU"/>
           </a:p>
@@ -6024,7 +6026,7 @@
           <a:p>
             <a:fld id="{F7021451-1387-4CA6-816F-3879F97B5CBC}" type="slidenum">
               <a:rPr lang="en-US"/>
-              <a:t>3</a:t>
+              <a:t>4</a:t>
             </a:fld>
             <a:endParaRPr lang="en-US"/>
           </a:p>
@@ -6108,7 +6110,7 @@
           <a:p>
             <a:fld id="{F7021451-1387-4CA6-816F-3879F97B5CBC}" type="slidenum">
               <a:rPr lang="en-US"/>
-              <a:t>4</a:t>
+              <a:t>5</a:t>
             </a:fld>
             <a:endParaRPr lang="en-US"/>
           </a:p>
@@ -6192,7 +6194,7 @@
           <a:p>
             <a:fld id="{F7021451-1387-4CA6-816F-3879F97B5CBC}" type="slidenum">
               <a:rPr lang="en-US"/>
-              <a:t>5</a:t>
+              <a:t>6</a:t>
             </a:fld>
             <a:endParaRPr lang="en-US"/>
           </a:p>
@@ -34762,7 +34764,7 @@
           <a:p>
             <a:r>
               <a:rPr lang="ru-RU" dirty="0"/>
-              <a:t>Цели и задачи работы</a:t>
+              <a:t>Цель работы</a:t>
             </a:r>
           </a:p>
         </p:txBody>
@@ -34833,10 +34835,10 @@
       </p:pic>
       <p:sp>
         <p:nvSpPr>
-          <p:cNvPr id="8" name="TextBox 7">
-            <a:extLst>
-              <a:ext uri="{FF2B5EF4-FFF2-40B4-BE49-F238E27FC236}">
-                <a16:creationId xmlns:a16="http://schemas.microsoft.com/office/drawing/2014/main" id="{1538644D-553C-424D-95DC-F14DF21BDC79}"/>
+          <p:cNvPr id="2" name="TextBox 1">
+            <a:extLst>
+              <a:ext uri="{FF2B5EF4-FFF2-40B4-BE49-F238E27FC236}">
+                <a16:creationId xmlns:a16="http://schemas.microsoft.com/office/drawing/2014/main" id="{E60D0E6D-9552-4291-BFC1-15263BC09767}"/>
               </a:ext>
             </a:extLst>
           </p:cNvPr>
@@ -34845,8 +34847,8 @@
         </p:nvSpPr>
         <p:spPr>
           <a:xfrm>
-            <a:off x="9394321" y="1222453"/>
-            <a:ext cx="7512935" cy="7971413"/>
+            <a:off x="8005295" y="7196328"/>
+            <a:ext cx="888385" cy="707886"/>
           </a:xfrm>
           <a:prstGeom prst="rect">
             <a:avLst/>
@@ -34854,89 +34856,16 @@
           <a:noFill/>
         </p:spPr>
         <p:txBody>
-          <a:bodyPr wrap="square">
+          <a:bodyPr wrap="none" rtlCol="0">
             <a:spAutoFit/>
           </a:bodyPr>
           <a:lstStyle/>
           <a:p>
             <a:r>
-              <a:rPr lang="ru-RU" sz="3200" dirty="0"/>
-              <a:t>Задачи, поставленные для выполнения цели:</a:t>
-            </a:r>
-          </a:p>
-          <a:p>
-            <a:endParaRPr lang="ru-RU" sz="3200" dirty="0"/>
-          </a:p>
-          <a:p>
-            <a:pPr marL="457200" indent="-457200">
-              <a:buAutoNum type="arabicPeriod"/>
-            </a:pPr>
-            <a:r>
-              <a:rPr lang="ru-RU" sz="3200" dirty="0"/>
-              <a:t>Проанализировать предметную область и существующие решения.</a:t>
-            </a:r>
-          </a:p>
-          <a:p>
-            <a:pPr marL="457200" indent="-457200">
-              <a:buFontTx/>
-              <a:buAutoNum type="arabicPeriod"/>
-            </a:pPr>
-            <a:r>
-              <a:rPr lang="ru-RU" sz="3200" dirty="0"/>
-              <a:t>Выбрать методы: LLM (</a:t>
-            </a:r>
-            <a:r>
-              <a:rPr lang="ru-RU" sz="3200" dirty="0" err="1"/>
-              <a:t>GigaChat</a:t>
-            </a:r>
-            <a:r>
-              <a:rPr lang="ru-RU" sz="3200" dirty="0"/>
-              <a:t>), RAG, механизм эскалации через JSON.</a:t>
-            </a:r>
-          </a:p>
-          <a:p>
-            <a:pPr marL="457200" indent="-457200">
-              <a:buAutoNum type="arabicPeriod"/>
-            </a:pPr>
-            <a:r>
-              <a:rPr lang="ru-RU" sz="3200" dirty="0"/>
-              <a:t>Спроектировать модульную архитектуру.</a:t>
-            </a:r>
-          </a:p>
-          <a:p>
-            <a:pPr marL="457200" indent="-457200">
-              <a:buFontTx/>
-              <a:buAutoNum type="arabicPeriod"/>
-            </a:pPr>
-            <a:r>
-              <a:rPr lang="ru-RU" sz="3200" dirty="0"/>
-              <a:t>Реализовать чат-бота с интеграцией </a:t>
-            </a:r>
-            <a:r>
-              <a:rPr lang="ru-RU" sz="3200" dirty="0" err="1"/>
-              <a:t>GigaChat</a:t>
-            </a:r>
-            <a:r>
-              <a:rPr lang="ru-RU" sz="3200" dirty="0"/>
-              <a:t>, векторной БД </a:t>
-            </a:r>
-            <a:r>
-              <a:rPr lang="ru-RU" sz="3200" dirty="0" err="1"/>
-              <a:t>Chroma</a:t>
-            </a:r>
-            <a:r>
-              <a:rPr lang="ru-RU" sz="3200" dirty="0"/>
-              <a:t> и механизмом эскалации.</a:t>
-            </a:r>
-          </a:p>
-          <a:p>
-            <a:pPr marL="457200" indent="-457200">
-              <a:buAutoNum type="arabicPeriod"/>
-            </a:pPr>
-            <a:r>
-              <a:rPr lang="ru-RU" sz="3200" dirty="0"/>
-              <a:t>Провести тестирование и оценить эффективность.</a:t>
-            </a:r>
+              <a:rPr lang="en-US" sz="4000" dirty="0"/>
+              <a:t>😎</a:t>
+            </a:r>
+            <a:endParaRPr lang="ru-RU" sz="4000" dirty="0"/>
           </a:p>
         </p:txBody>
       </p:sp>
@@ -34949,6 +34878,177 @@
 </file>
 
 <file path=ppt/slides/slide3.xml><?xml version="1.0" encoding="utf-8"?>
+<p:sld xmlns:a="http://schemas.openxmlformats.org/drawingml/2006/main" xmlns:r="http://schemas.openxmlformats.org/officeDocument/2006/relationships" xmlns:p="http://schemas.openxmlformats.org/presentationml/2006/main">
+  <p:cSld>
+    <p:spTree>
+      <p:nvGrpSpPr>
+        <p:cNvPr id="1" name=""/>
+        <p:cNvGrpSpPr/>
+        <p:nvPr/>
+      </p:nvGrpSpPr>
+      <p:grpSpPr>
+        <a:xfrm>
+          <a:off x="0" y="0"/>
+          <a:ext cx="0" cy="0"/>
+          <a:chOff x="0" y="0"/>
+          <a:chExt cx="0" cy="0"/>
+        </a:xfrm>
+      </p:grpSpPr>
+      <p:sp>
+        <p:nvSpPr>
+          <p:cNvPr id="2" name="Заголовок 1">
+            <a:extLst>
+              <a:ext uri="{FF2B5EF4-FFF2-40B4-BE49-F238E27FC236}">
+                <a16:creationId xmlns:a16="http://schemas.microsoft.com/office/drawing/2014/main" id="{6750640E-F1AD-43DC-A277-3CA77DDD5B33}"/>
+              </a:ext>
+            </a:extLst>
+          </p:cNvPr>
+          <p:cNvSpPr>
+            <a:spLocks noGrp="1"/>
+          </p:cNvSpPr>
+          <p:nvPr>
+            <p:ph type="title"/>
+          </p:nvPr>
+        </p:nvSpPr>
+        <p:spPr/>
+        <p:txBody>
+          <a:bodyPr/>
+          <a:lstStyle/>
+          <a:p>
+            <a:r>
+              <a:rPr lang="ru-RU" dirty="0"/>
+              <a:t>Задачи работы</a:t>
+            </a:r>
+          </a:p>
+        </p:txBody>
+      </p:sp>
+      <p:sp>
+        <p:nvSpPr>
+          <p:cNvPr id="4" name="Текст 3">
+            <a:extLst>
+              <a:ext uri="{FF2B5EF4-FFF2-40B4-BE49-F238E27FC236}">
+                <a16:creationId xmlns:a16="http://schemas.microsoft.com/office/drawing/2014/main" id="{1ED3EB12-6682-44BA-945D-34C7054C82F4}"/>
+              </a:ext>
+            </a:extLst>
+          </p:cNvPr>
+          <p:cNvSpPr txBox="1">
+            <a:spLocks noGrp="1"/>
+          </p:cNvSpPr>
+          <p:nvPr>
+            <p:ph type="body" sz="quarter" idx="12"/>
+          </p:nvPr>
+        </p:nvSpPr>
+        <p:spPr>
+          <a:xfrm>
+            <a:off x="1047750" y="2163763"/>
+            <a:ext cx="16167100" cy="5907087"/>
+          </a:xfrm>
+          <a:prstGeom prst="rect">
+            <a:avLst/>
+          </a:prstGeom>
+          <a:noFill/>
+        </p:spPr>
+        <p:txBody>
+          <a:bodyPr wrap="square">
+            <a:spAutoFit/>
+          </a:bodyPr>
+          <a:lstStyle/>
+          <a:p>
+            <a:r>
+              <a:rPr lang="ru-RU" dirty="0"/>
+              <a:t>Задачи, поставленные для выполнения цели:</a:t>
+            </a:r>
+          </a:p>
+          <a:p>
+            <a:endParaRPr lang="ru-RU" dirty="0"/>
+          </a:p>
+          <a:p>
+            <a:pPr marL="457200" indent="-457200">
+              <a:buAutoNum type="arabicPeriod"/>
+            </a:pPr>
+            <a:r>
+              <a:rPr lang="ru-RU" dirty="0"/>
+              <a:t>Проанализировать предметную область и существующие решения.</a:t>
+            </a:r>
+          </a:p>
+          <a:p>
+            <a:pPr marL="457200" indent="-457200">
+              <a:buFontTx/>
+              <a:buAutoNum type="arabicPeriod"/>
+            </a:pPr>
+            <a:r>
+              <a:rPr lang="ru-RU" dirty="0"/>
+              <a:t>Выбрать методы: LLM (</a:t>
+            </a:r>
+            <a:r>
+              <a:rPr lang="ru-RU" dirty="0" err="1"/>
+              <a:t>GigaChat</a:t>
+            </a:r>
+            <a:r>
+              <a:rPr lang="ru-RU" dirty="0"/>
+              <a:t>), RAG, механизм эскалации через JSON.</a:t>
+            </a:r>
+          </a:p>
+          <a:p>
+            <a:pPr marL="457200" indent="-457200">
+              <a:buAutoNum type="arabicPeriod"/>
+            </a:pPr>
+            <a:r>
+              <a:rPr lang="ru-RU" dirty="0"/>
+              <a:t>Спроектировать модульную архитектуру.</a:t>
+            </a:r>
+          </a:p>
+          <a:p>
+            <a:pPr marL="457200" indent="-457200">
+              <a:buFontTx/>
+              <a:buAutoNum type="arabicPeriod"/>
+            </a:pPr>
+            <a:r>
+              <a:rPr lang="ru-RU" dirty="0"/>
+              <a:t>Реализовать чат-бота с интеграцией </a:t>
+            </a:r>
+            <a:r>
+              <a:rPr lang="ru-RU" dirty="0" err="1"/>
+              <a:t>GigaChat</a:t>
+            </a:r>
+            <a:r>
+              <a:rPr lang="ru-RU" dirty="0"/>
+              <a:t>, векторной БД </a:t>
+            </a:r>
+            <a:r>
+              <a:rPr lang="ru-RU" dirty="0" err="1"/>
+              <a:t>Chroma</a:t>
+            </a:r>
+            <a:r>
+              <a:rPr lang="ru-RU" dirty="0"/>
+              <a:t> и механизмом эскалации.</a:t>
+            </a:r>
+          </a:p>
+          <a:p>
+            <a:pPr marL="457200" indent="-457200">
+              <a:buAutoNum type="arabicPeriod"/>
+            </a:pPr>
+            <a:r>
+              <a:rPr lang="ru-RU" dirty="0"/>
+              <a:t>Провести тестирование и оценить эффективность.</a:t>
+            </a:r>
+          </a:p>
+        </p:txBody>
+      </p:sp>
+    </p:spTree>
+    <p:extLst>
+      <p:ext uri="{BB962C8B-B14F-4D97-AF65-F5344CB8AC3E}">
+        <p14:creationId xmlns:p14="http://schemas.microsoft.com/office/powerpoint/2010/main" val="3014670172"/>
+      </p:ext>
+    </p:extLst>
+  </p:cSld>
+  <p:clrMapOvr>
+    <a:masterClrMapping/>
+  </p:clrMapOvr>
+</p:sld>
+</file>
+
+<file path=ppt/slides/slide4.xml><?xml version="1.0" encoding="utf-8"?>
 <p:sld xmlns:a="http://schemas.openxmlformats.org/drawingml/2006/main" xmlns:r="http://schemas.openxmlformats.org/officeDocument/2006/relationships" xmlns:p="http://schemas.openxmlformats.org/presentationml/2006/main">
   <p:cSld name="Slide 7">
     <p:bg>
@@ -35013,129 +35113,6 @@
       </p:sp>
       <p:sp>
         <p:nvSpPr>
-          <p:cNvPr id="3" name="Текст 2">
-            <a:extLst>
-              <a:ext uri="{FF2B5EF4-FFF2-40B4-BE49-F238E27FC236}">
-                <a16:creationId xmlns:a16="http://schemas.microsoft.com/office/drawing/2014/main" id="{F967A342-8E2B-4A0C-8E11-4645F11078CD}"/>
-              </a:ext>
-            </a:extLst>
-          </p:cNvPr>
-          <p:cNvSpPr>
-            <a:spLocks noGrp="1"/>
-          </p:cNvSpPr>
-          <p:nvPr>
-            <p:ph type="body" sz="quarter" idx="10"/>
-          </p:nvPr>
-        </p:nvSpPr>
-        <p:spPr>
-          <a:xfrm>
-            <a:off x="9658352" y="3043109"/>
-            <a:ext cx="7505700" cy="4200779"/>
-          </a:xfrm>
-        </p:spPr>
-        <p:txBody>
-          <a:bodyPr/>
-          <a:lstStyle/>
-          <a:p>
-            <a:r>
-              <a:rPr lang="ru-RU" sz="2800" dirty="0"/>
-              <a:t>Технологический стек состоит из: </a:t>
-            </a:r>
-            <a:r>
-              <a:rPr lang="en-US" sz="2800" dirty="0"/>
-              <a:t>Python 3.10, </a:t>
-            </a:r>
-            <a:r>
-              <a:rPr lang="en-US" sz="2800" dirty="0" err="1"/>
-              <a:t>LangChain</a:t>
-            </a:r>
-            <a:r>
-              <a:rPr lang="en-US" sz="2800" dirty="0"/>
-              <a:t>, </a:t>
-            </a:r>
-            <a:r>
-              <a:rPr lang="en-US" sz="2800" dirty="0" err="1"/>
-              <a:t>GigaChat</a:t>
-            </a:r>
-            <a:r>
-              <a:rPr lang="en-US" sz="2800" dirty="0"/>
-              <a:t>, Chroma, </a:t>
-            </a:r>
-            <a:r>
-              <a:rPr lang="ru-RU" sz="2800" dirty="0" err="1"/>
-              <a:t>эмбеддинги</a:t>
-            </a:r>
-            <a:r>
-              <a:rPr lang="ru-RU" sz="2800" dirty="0"/>
-              <a:t> </a:t>
-            </a:r>
-            <a:r>
-              <a:rPr lang="en-US" sz="2800" dirty="0"/>
-              <a:t>paraphrase-multilingual-MiniLM-L12-v2, YOLOv8n.</a:t>
-            </a:r>
-            <a:endParaRPr lang="ru-RU" sz="2800" dirty="0"/>
-          </a:p>
-          <a:p>
-            <a:endParaRPr lang="ru-RU" sz="2800" dirty="0"/>
-          </a:p>
-          <a:p>
-            <a:r>
-              <a:rPr lang="ru-RU" sz="2800" dirty="0"/>
-              <a:t>Механизм эскалации является системным </a:t>
-            </a:r>
-            <a:r>
-              <a:rPr lang="ru-RU" sz="2800" dirty="0" err="1"/>
-              <a:t>промптом</a:t>
-            </a:r>
-            <a:r>
-              <a:rPr lang="ru-RU" sz="2800" dirty="0"/>
-              <a:t> -</a:t>
-            </a:r>
-            <a:r>
-              <a:rPr lang="en-US" sz="2800" dirty="0"/>
-              <a:t>&gt;</a:t>
-            </a:r>
-            <a:r>
-              <a:rPr lang="ru-RU" sz="2800" dirty="0"/>
-              <a:t> если нет ответа или просьба оператора </a:t>
-            </a:r>
-            <a:r>
-              <a:rPr lang="en-US" sz="2800" dirty="0"/>
-              <a:t>-&gt;</a:t>
-            </a:r>
-            <a:r>
-              <a:rPr lang="ru-RU" sz="2800" dirty="0"/>
-              <a:t> JSON {"</a:t>
-            </a:r>
-            <a:r>
-              <a:rPr lang="ru-RU" sz="2800" dirty="0" err="1"/>
-              <a:t>escalate</a:t>
-            </a:r>
-            <a:r>
-              <a:rPr lang="ru-RU" sz="2800" dirty="0"/>
-              <a:t>": </a:t>
-            </a:r>
-            <a:r>
-              <a:rPr lang="ru-RU" sz="2800" dirty="0" err="1"/>
-              <a:t>true</a:t>
-            </a:r>
-            <a:r>
-              <a:rPr lang="ru-RU" sz="2800" dirty="0"/>
-              <a:t>, "</a:t>
-            </a:r>
-            <a:r>
-              <a:rPr lang="ru-RU" sz="2800" dirty="0" err="1"/>
-              <a:t>reason</a:t>
-            </a:r>
-            <a:r>
-              <a:rPr lang="ru-RU" sz="2800" dirty="0"/>
-              <a:t>": "..."}</a:t>
-            </a:r>
-          </a:p>
-        </p:txBody>
-      </p:sp>
-      <p:sp>
-        <p:nvSpPr>
           <p:cNvPr id="7" name="Текст 6">
             <a:extLst>
               <a:ext uri="{FF2B5EF4-FFF2-40B4-BE49-F238E27FC236}">
@@ -35219,12 +35196,317 @@
             </a:r>
             <a:r>
               <a:rPr lang="en-US" sz="2800" dirty="0" err="1"/>
-              <a:t>ConversationBufferWindowMemory</a:t>
+              <a:t>conversation_history</a:t>
             </a:r>
             <a:endParaRPr lang="ru-RU" sz="2800" dirty="0"/>
           </a:p>
         </p:txBody>
       </p:sp>
+      <p:sp>
+        <p:nvSpPr>
+          <p:cNvPr id="5" name="Текст 4">
+            <a:extLst>
+              <a:ext uri="{FF2B5EF4-FFF2-40B4-BE49-F238E27FC236}">
+                <a16:creationId xmlns:a16="http://schemas.microsoft.com/office/drawing/2014/main" id="{E61243D3-96C2-41DA-9228-0AEDA2BA1F4B}"/>
+              </a:ext>
+            </a:extLst>
+          </p:cNvPr>
+          <p:cNvSpPr>
+            <a:spLocks noGrp="1"/>
+          </p:cNvSpPr>
+          <p:nvPr>
+            <p:ph type="body" sz="quarter" idx="10"/>
+          </p:nvPr>
+        </p:nvSpPr>
+        <p:spPr>
+          <a:xfrm>
+            <a:off x="9658351" y="2117725"/>
+            <a:ext cx="4734305" cy="585788"/>
+          </a:xfrm>
+        </p:spPr>
+        <p:txBody>
+          <a:bodyPr/>
+          <a:lstStyle/>
+          <a:p>
+            <a:r>
+              <a:rPr lang="ru-RU" sz="3200" dirty="0"/>
+              <a:t>Технологический стек</a:t>
+            </a:r>
+            <a:endParaRPr lang="en-US" sz="3200" dirty="0"/>
+          </a:p>
+        </p:txBody>
+      </p:sp>
+      <p:pic>
+        <p:nvPicPr>
+          <p:cNvPr id="1026" name="Picture 2" descr="Python (programming language) - Wikipedia">
+            <a:extLst>
+              <a:ext uri="{FF2B5EF4-FFF2-40B4-BE49-F238E27FC236}">
+                <a16:creationId xmlns:a16="http://schemas.microsoft.com/office/drawing/2014/main" id="{C0C6D7F3-6AA6-47F7-90E2-EEF01CA2753B}"/>
+              </a:ext>
+            </a:extLst>
+          </p:cNvPr>
+          <p:cNvPicPr>
+            <a:picLocks noChangeAspect="1" noChangeArrowheads="1"/>
+          </p:cNvPicPr>
+          <p:nvPr/>
+        </p:nvPicPr>
+        <p:blipFill>
+          <a:blip r:embed="rId3">
+            <a:extLst>
+              <a:ext uri="{28A0092B-C50C-407E-A947-70E740481C1C}">
+                <a14:useLocalDpi xmlns:a14="http://schemas.microsoft.com/office/drawing/2010/main" val="0"/>
+              </a:ext>
+            </a:extLst>
+          </a:blip>
+          <a:srcRect/>
+          <a:stretch>
+            <a:fillRect/>
+          </a:stretch>
+        </p:blipFill>
+        <p:spPr bwMode="auto">
+          <a:xfrm>
+            <a:off x="14775939" y="2481070"/>
+            <a:ext cx="1642874" cy="1642874"/>
+          </a:xfrm>
+          <a:prstGeom prst="rect">
+            <a:avLst/>
+          </a:prstGeom>
+          <a:noFill/>
+          <a:extLst>
+            <a:ext uri="{909E8E84-426E-40DD-AFC4-6F175D3DCCD1}">
+              <a14:hiddenFill xmlns:a14="http://schemas.microsoft.com/office/drawing/2010/main">
+                <a:solidFill>
+                  <a:srgbClr val="FFFFFF"/>
+                </a:solidFill>
+              </a14:hiddenFill>
+            </a:ext>
+          </a:extLst>
+        </p:spPr>
+      </p:pic>
+      <p:pic>
+        <p:nvPicPr>
+          <p:cNvPr id="1030" name="Picture 6">
+            <a:extLst>
+              <a:ext uri="{FF2B5EF4-FFF2-40B4-BE49-F238E27FC236}">
+                <a16:creationId xmlns:a16="http://schemas.microsoft.com/office/drawing/2014/main" id="{E754858E-E44C-4C8C-89C9-9684D49C94E7}"/>
+              </a:ext>
+            </a:extLst>
+          </p:cNvPr>
+          <p:cNvPicPr>
+            <a:picLocks noChangeAspect="1" noChangeArrowheads="1"/>
+          </p:cNvPicPr>
+          <p:nvPr/>
+        </p:nvPicPr>
+        <p:blipFill>
+          <a:blip r:embed="rId4">
+            <a:extLst>
+              <a:ext uri="{28A0092B-C50C-407E-A947-70E740481C1C}">
+                <a14:useLocalDpi xmlns:a14="http://schemas.microsoft.com/office/drawing/2010/main" val="0"/>
+              </a:ext>
+            </a:extLst>
+          </a:blip>
+          <a:srcRect/>
+          <a:stretch>
+            <a:fillRect/>
+          </a:stretch>
+        </p:blipFill>
+        <p:spPr bwMode="auto">
+          <a:xfrm>
+            <a:off x="9734553" y="6605450"/>
+            <a:ext cx="3429000" cy="585788"/>
+          </a:xfrm>
+          <a:prstGeom prst="rect">
+            <a:avLst/>
+          </a:prstGeom>
+          <a:noFill/>
+          <a:extLst>
+            <a:ext uri="{909E8E84-426E-40DD-AFC4-6F175D3DCCD1}">
+              <a14:hiddenFill xmlns:a14="http://schemas.microsoft.com/office/drawing/2010/main">
+                <a:solidFill>
+                  <a:srgbClr val="FFFFFF"/>
+                </a:solidFill>
+              </a14:hiddenFill>
+            </a:ext>
+          </a:extLst>
+        </p:spPr>
+      </p:pic>
+      <p:pic>
+        <p:nvPicPr>
+          <p:cNvPr id="1032" name="Picture 8" descr="ГигаЧат - Скачать логотип в векторе SVG или PNG без фона">
+            <a:extLst>
+              <a:ext uri="{FF2B5EF4-FFF2-40B4-BE49-F238E27FC236}">
+                <a16:creationId xmlns:a16="http://schemas.microsoft.com/office/drawing/2014/main" id="{835094E7-BC1A-4430-B2CE-9C7253833CDE}"/>
+              </a:ext>
+            </a:extLst>
+          </p:cNvPr>
+          <p:cNvPicPr>
+            <a:picLocks noChangeAspect="1" noChangeArrowheads="1"/>
+          </p:cNvPicPr>
+          <p:nvPr/>
+        </p:nvPicPr>
+        <p:blipFill>
+          <a:blip r:embed="rId5">
+            <a:extLst>
+              <a:ext uri="{28A0092B-C50C-407E-A947-70E740481C1C}">
+                <a14:useLocalDpi xmlns:a14="http://schemas.microsoft.com/office/drawing/2010/main" val="0"/>
+              </a:ext>
+            </a:extLst>
+          </a:blip>
+          <a:srcRect/>
+          <a:stretch>
+            <a:fillRect/>
+          </a:stretch>
+        </p:blipFill>
+        <p:spPr bwMode="auto">
+          <a:xfrm>
+            <a:off x="9598043" y="3128611"/>
+            <a:ext cx="2477370" cy="768415"/>
+          </a:xfrm>
+          <a:prstGeom prst="rect">
+            <a:avLst/>
+          </a:prstGeom>
+          <a:noFill/>
+          <a:extLst>
+            <a:ext uri="{909E8E84-426E-40DD-AFC4-6F175D3DCCD1}">
+              <a14:hiddenFill xmlns:a14="http://schemas.microsoft.com/office/drawing/2010/main">
+                <a:solidFill>
+                  <a:srgbClr val="FFFFFF"/>
+                </a:solidFill>
+              </a14:hiddenFill>
+            </a:ext>
+          </a:extLst>
+        </p:spPr>
+      </p:pic>
+      <p:sp>
+        <p:nvSpPr>
+          <p:cNvPr id="6" name="TextBox 5">
+            <a:extLst>
+              <a:ext uri="{FF2B5EF4-FFF2-40B4-BE49-F238E27FC236}">
+                <a16:creationId xmlns:a16="http://schemas.microsoft.com/office/drawing/2014/main" id="{0F59C641-DA09-45B4-8655-F0821AB1391C}"/>
+              </a:ext>
+            </a:extLst>
+          </p:cNvPr>
+          <p:cNvSpPr txBox="1"/>
+          <p:nvPr/>
+        </p:nvSpPr>
+        <p:spPr>
+          <a:xfrm>
+            <a:off x="14775939" y="4319025"/>
+            <a:ext cx="2173993" cy="523220"/>
+          </a:xfrm>
+          <a:prstGeom prst="rect">
+            <a:avLst/>
+          </a:prstGeom>
+          <a:noFill/>
+        </p:spPr>
+        <p:txBody>
+          <a:bodyPr wrap="none" rtlCol="0">
+            <a:spAutoFit/>
+          </a:bodyPr>
+          <a:lstStyle/>
+          <a:p>
+            <a:r>
+              <a:rPr lang="en-US" sz="2800" dirty="0"/>
+              <a:t>Python 3.10</a:t>
+            </a:r>
+            <a:endParaRPr lang="ru-RU" sz="2800" dirty="0"/>
+          </a:p>
+        </p:txBody>
+      </p:sp>
+      <p:pic>
+        <p:nvPicPr>
+          <p:cNvPr id="1034" name="Picture 10" descr="ChromaDB: An Overview. ChromaDB is a powerful vector database… | by VIKRANT  SINGH | Medium">
+            <a:extLst>
+              <a:ext uri="{FF2B5EF4-FFF2-40B4-BE49-F238E27FC236}">
+                <a16:creationId xmlns:a16="http://schemas.microsoft.com/office/drawing/2014/main" id="{F60DF9E2-A000-4F7C-8DCD-8E436F1F8618}"/>
+              </a:ext>
+            </a:extLst>
+          </p:cNvPr>
+          <p:cNvPicPr>
+            <a:picLocks noChangeAspect="1" noChangeArrowheads="1"/>
+          </p:cNvPicPr>
+          <p:nvPr/>
+        </p:nvPicPr>
+        <p:blipFill>
+          <a:blip r:embed="rId6">
+            <a:extLst>
+              <a:ext uri="{28A0092B-C50C-407E-A947-70E740481C1C}">
+                <a14:useLocalDpi xmlns:a14="http://schemas.microsoft.com/office/drawing/2010/main" val="0"/>
+              </a:ext>
+            </a:extLst>
+          </a:blip>
+          <a:srcRect/>
+          <a:stretch>
+            <a:fillRect/>
+          </a:stretch>
+        </p:blipFill>
+        <p:spPr bwMode="auto">
+          <a:xfrm>
+            <a:off x="12399230" y="4422190"/>
+            <a:ext cx="1528645" cy="1442618"/>
+          </a:xfrm>
+          <a:prstGeom prst="rect">
+            <a:avLst/>
+          </a:prstGeom>
+          <a:noFill/>
+          <a:extLst>
+            <a:ext uri="{909E8E84-426E-40DD-AFC4-6F175D3DCCD1}">
+              <a14:hiddenFill xmlns:a14="http://schemas.microsoft.com/office/drawing/2010/main">
+                <a:solidFill>
+                  <a:srgbClr val="FFFFFF"/>
+                </a:solidFill>
+              </a14:hiddenFill>
+            </a:ext>
+          </a:extLst>
+        </p:spPr>
+      </p:pic>
+      <p:pic>
+        <p:nvPicPr>
+          <p:cNvPr id="1036" name="Picture 12" descr="HPCwire - Since 1987 – Covering the Fastest Computers in the World and the  People Who Run Them">
+            <a:extLst>
+              <a:ext uri="{FF2B5EF4-FFF2-40B4-BE49-F238E27FC236}">
+                <a16:creationId xmlns:a16="http://schemas.microsoft.com/office/drawing/2014/main" id="{C106F72D-368F-44E3-BB3B-B8A0FB48117F}"/>
+              </a:ext>
+            </a:extLst>
+          </p:cNvPr>
+          <p:cNvPicPr>
+            <a:picLocks noChangeAspect="1" noChangeArrowheads="1"/>
+          </p:cNvPicPr>
+          <p:nvPr/>
+        </p:nvPicPr>
+        <p:blipFill>
+          <a:blip r:embed="rId7">
+            <a:extLst>
+              <a:ext uri="{28A0092B-C50C-407E-A947-70E740481C1C}">
+                <a14:useLocalDpi xmlns:a14="http://schemas.microsoft.com/office/drawing/2010/main" val="0"/>
+              </a:ext>
+            </a:extLst>
+          </a:blip>
+          <a:srcRect/>
+          <a:stretch>
+            <a:fillRect/>
+          </a:stretch>
+        </p:blipFill>
+        <p:spPr bwMode="auto">
+          <a:xfrm>
+            <a:off x="14316511" y="5607546"/>
+            <a:ext cx="2561729" cy="2561729"/>
+          </a:xfrm>
+          <a:prstGeom prst="rect">
+            <a:avLst/>
+          </a:prstGeom>
+          <a:noFill/>
+          <a:extLst>
+            <a:ext uri="{909E8E84-426E-40DD-AFC4-6F175D3DCCD1}">
+              <a14:hiddenFill xmlns:a14="http://schemas.microsoft.com/office/drawing/2010/main">
+                <a:solidFill>
+                  <a:srgbClr val="FFFFFF"/>
+                </a:solidFill>
+              </a14:hiddenFill>
+            </a:ext>
+          </a:extLst>
+        </p:spPr>
+      </p:pic>
     </p:spTree>
   </p:cSld>
   <p:clrMapOvr>
@@ -35233,7 +35515,7 @@
 </p:sld>
 </file>
 
-<file path=ppt/slides/slide4.xml><?xml version="1.0" encoding="utf-8"?>
+<file path=ppt/slides/slide5.xml><?xml version="1.0" encoding="utf-8"?>
 <p:sld xmlns:a="http://schemas.openxmlformats.org/drawingml/2006/main" xmlns:r="http://schemas.openxmlformats.org/officeDocument/2006/relationships" xmlns:p="http://schemas.openxmlformats.org/presentationml/2006/main">
   <p:cSld name="Slide 18">
     <p:bg>
@@ -35269,6 +35551,52 @@
       </p:grpSpPr>
       <p:sp>
         <p:nvSpPr>
+          <p:cNvPr id="2" name="Прямоугольник 1">
+            <a:extLst>
+              <a:ext uri="{FF2B5EF4-FFF2-40B4-BE49-F238E27FC236}">
+                <a16:creationId xmlns:a16="http://schemas.microsoft.com/office/drawing/2014/main" id="{A43B25F4-BFCB-4302-AA1B-5D577F96ECA7}"/>
+              </a:ext>
+            </a:extLst>
+          </p:cNvPr>
+          <p:cNvSpPr/>
+          <p:nvPr/>
+        </p:nvSpPr>
+        <p:spPr>
+          <a:xfrm>
+            <a:off x="653795" y="1581912"/>
+            <a:ext cx="13245085" cy="804665"/>
+          </a:xfrm>
+          <a:prstGeom prst="rect">
+            <a:avLst/>
+          </a:prstGeom>
+        </p:spPr>
+        <p:style>
+          <a:lnRef idx="2">
+            <a:schemeClr val="dk1">
+              <a:shade val="50000"/>
+            </a:schemeClr>
+          </a:lnRef>
+          <a:fillRef idx="1">
+            <a:schemeClr val="dk1"/>
+          </a:fillRef>
+          <a:effectRef idx="0">
+            <a:schemeClr val="dk1"/>
+          </a:effectRef>
+          <a:fontRef idx="minor">
+            <a:schemeClr val="lt1"/>
+          </a:fontRef>
+        </p:style>
+        <p:txBody>
+          <a:bodyPr rtlCol="0" anchor="ctr"/>
+          <a:lstStyle/>
+          <a:p>
+            <a:pPr algn="ctr"/>
+            <a:endParaRPr lang="ru-RU"/>
+          </a:p>
+        </p:txBody>
+      </p:sp>
+      <p:sp>
+        <p:nvSpPr>
           <p:cNvPr id="3" name="Заголовок 2">
             <a:extLst>
               <a:ext uri="{FF2B5EF4-FFF2-40B4-BE49-F238E27FC236}">
@@ -35316,7 +35644,7 @@
         <p:spPr>
           <a:xfrm>
             <a:off x="714373" y="1711143"/>
-            <a:ext cx="5567555" cy="5262979"/>
+            <a:ext cx="5567555" cy="5016758"/>
           </a:xfrm>
           <a:prstGeom prst="rect">
             <a:avLst/>
@@ -35377,7 +35705,7 @@
             </a:r>
           </a:p>
           <a:p>
-            <a:endParaRPr lang="ru-RU" sz="2800" dirty="0">
+            <a:endParaRPr lang="ru-RU" sz="3200" dirty="0">
               <a:solidFill>
                 <a:schemeClr val="bg1"/>
               </a:solidFill>
@@ -35392,43 +35720,32 @@
                 </a:solidFill>
                 <a:latin typeface="Nunito SemiBold" pitchFamily="2" charset="-52"/>
               </a:rPr>
-              <a:t>RAG-поиск по документации (.</a:t>
-            </a:r>
-            <a:r>
-              <a:rPr lang="ru-RU" sz="2800" dirty="0" err="1">
+              <a:t>RAG-поиск по документации</a:t>
+            </a:r>
+            <a:endParaRPr lang="en-US" sz="2800" dirty="0">
+              <a:solidFill>
+                <a:schemeClr val="bg1"/>
+              </a:solidFill>
+              <a:latin typeface="Nunito SemiBold" pitchFamily="2" charset="-52"/>
+            </a:endParaRPr>
+          </a:p>
+          <a:p>
+            <a:endParaRPr lang="ru-RU" sz="3600" dirty="0">
+              <a:solidFill>
+                <a:schemeClr val="bg1"/>
+              </a:solidFill>
+              <a:latin typeface="Nunito SemiBold" pitchFamily="2" charset="-52"/>
+            </a:endParaRPr>
+          </a:p>
+          <a:p>
+            <a:r>
+              <a:rPr lang="ru-RU" sz="2800" dirty="0">
                 <a:solidFill>
                   <a:schemeClr val="bg1"/>
                 </a:solidFill>
                 <a:latin typeface="Nunito SemiBold" pitchFamily="2" charset="-52"/>
               </a:rPr>
-              <a:t>txt</a:t>
-            </a:r>
-            <a:r>
-              <a:rPr lang="ru-RU" sz="2800" dirty="0">
-                <a:solidFill>
-                  <a:schemeClr val="bg1"/>
-                </a:solidFill>
-                <a:latin typeface="Nunito SemiBold" pitchFamily="2" charset="-52"/>
-              </a:rPr>
-              <a:t>, .</a:t>
-            </a:r>
-            <a:r>
-              <a:rPr lang="ru-RU" sz="2800" dirty="0" err="1">
-                <a:solidFill>
-                  <a:schemeClr val="bg1"/>
-                </a:solidFill>
-                <a:latin typeface="Nunito SemiBold" pitchFamily="2" charset="-52"/>
-              </a:rPr>
-              <a:t>pdf</a:t>
-            </a:r>
-            <a:r>
-              <a:rPr lang="ru-RU" sz="2800" dirty="0">
-                <a:solidFill>
-                  <a:schemeClr val="bg1"/>
-                </a:solidFill>
-                <a:latin typeface="Nunito SemiBold" pitchFamily="2" charset="-52"/>
-              </a:rPr>
-              <a:t>)</a:t>
+              <a:t>Контекст 5 последних сообщений</a:t>
             </a:r>
           </a:p>
           <a:p>
@@ -35447,25 +35764,6 @@
                 </a:solidFill>
                 <a:latin typeface="Nunito SemiBold" pitchFamily="2" charset="-52"/>
               </a:rPr>
-              <a:t>Контекст 5 последних сообщений</a:t>
-            </a:r>
-          </a:p>
-          <a:p>
-            <a:endParaRPr lang="ru-RU" sz="2800" dirty="0">
-              <a:solidFill>
-                <a:schemeClr val="bg1"/>
-              </a:solidFill>
-              <a:latin typeface="Nunito SemiBold" pitchFamily="2" charset="-52"/>
-            </a:endParaRPr>
-          </a:p>
-          <a:p>
-            <a:r>
-              <a:rPr lang="ru-RU" sz="2800" dirty="0">
-                <a:solidFill>
-                  <a:schemeClr val="bg1"/>
-                </a:solidFill>
-                <a:latin typeface="Nunito SemiBold" pitchFamily="2" charset="-52"/>
-              </a:rPr>
               <a:t>Эскалация по 4 критериям</a:t>
             </a:r>
           </a:p>
@@ -35486,7 +35784,7 @@
         <p:spPr>
           <a:xfrm>
             <a:off x="6281928" y="1711143"/>
-            <a:ext cx="4901184" cy="5262979"/>
+            <a:ext cx="4901184" cy="5047536"/>
           </a:xfrm>
           <a:prstGeom prst="rect">
             <a:avLst/>
@@ -35544,7 +35842,7 @@
             </a:r>
           </a:p>
           <a:p>
-            <a:endParaRPr lang="ru-RU" sz="2800" dirty="0">
+            <a:endParaRPr lang="ru-RU" dirty="0">
               <a:solidFill>
                 <a:schemeClr val="bg1"/>
               </a:solidFill>
@@ -35563,7 +35861,7 @@
             </a:r>
           </a:p>
           <a:p>
-            <a:endParaRPr lang="ru-RU" sz="2800" dirty="0">
+            <a:endParaRPr lang="ru-RU" sz="2400" dirty="0">
               <a:solidFill>
                 <a:schemeClr val="bg1"/>
               </a:solidFill>
@@ -35582,7 +35880,7 @@
             </a:r>
           </a:p>
           <a:p>
-            <a:endParaRPr lang="ru-RU" sz="2800" dirty="0">
+            <a:endParaRPr lang="ru-RU" sz="2400" dirty="0">
               <a:solidFill>
                 <a:schemeClr val="bg1"/>
               </a:solidFill>
@@ -35616,8 +35914,8 @@
         </p:nvSpPr>
         <p:spPr>
           <a:xfrm>
-            <a:off x="11183111" y="1746272"/>
-            <a:ext cx="3931919" cy="3108543"/>
+            <a:off x="11183111" y="1758606"/>
+            <a:ext cx="3931919" cy="3724096"/>
           </a:xfrm>
           <a:prstGeom prst="rect">
             <a:avLst/>
@@ -35641,7 +35939,7 @@
             </a:r>
           </a:p>
           <a:p>
-            <a:endParaRPr lang="ru-RU" sz="2800" dirty="0">
+            <a:endParaRPr lang="ru-RU" sz="3600" dirty="0">
               <a:solidFill>
                 <a:schemeClr val="bg1"/>
               </a:solidFill>
@@ -35660,7 +35958,7 @@
             </a:r>
           </a:p>
           <a:p>
-            <a:endParaRPr lang="ru-RU" sz="2800" dirty="0">
+            <a:endParaRPr lang="ru-RU" sz="4800" dirty="0">
               <a:solidFill>
                 <a:schemeClr val="bg1"/>
               </a:solidFill>
@@ -35679,7 +35977,7 @@
             </a:r>
           </a:p>
           <a:p>
-            <a:endParaRPr lang="ru-RU" sz="2800" dirty="0">
+            <a:endParaRPr lang="ru-RU" sz="4000" dirty="0">
               <a:solidFill>
                 <a:schemeClr val="bg1"/>
               </a:solidFill>
@@ -35694,16 +35992,16 @@
                 </a:solidFill>
                 <a:latin typeface="Nunito SemiBold" pitchFamily="2" charset="-52"/>
               </a:rPr>
-              <a:t>Видео «/ /</a:t>
-            </a:r>
-            <a:r>
-              <a:rPr lang="ru-RU" sz="2800" dirty="0" err="1">
+              <a:t>Видео</a:t>
+            </a:r>
+            <a:r>
+              <a:rPr lang="en-US" sz="2800" dirty="0">
                 <a:solidFill>
                   <a:schemeClr val="bg1"/>
                 </a:solidFill>
                 <a:latin typeface="Nunito SemiBold" pitchFamily="2" charset="-52"/>
               </a:rPr>
-              <a:t>start</a:t>
+              <a:t>: </a:t>
             </a:r>
             <a:r>
               <a:rPr lang="ru-RU" sz="2800" dirty="0">
@@ -35712,7 +36010,7 @@
                 </a:solidFill>
                 <a:latin typeface="Nunito SemiBold" pitchFamily="2" charset="-52"/>
               </a:rPr>
-              <a:t>»: &lt;0,1 с</a:t>
+              <a:t>&lt;0,1 с</a:t>
             </a:r>
           </a:p>
         </p:txBody>
@@ -35726,13 +36024,15 @@
               </a:ext>
             </a:extLst>
           </p:cNvPr>
-          <p:cNvCxnSpPr/>
+          <p:cNvCxnSpPr>
+            <a:cxnSpLocks/>
+          </p:cNvCxnSpPr>
           <p:nvPr/>
         </p:nvCxnSpPr>
         <p:spPr>
           <a:xfrm>
-            <a:off x="6144768" y="1819656"/>
-            <a:ext cx="0" cy="5154466"/>
+            <a:off x="6144768" y="1581912"/>
+            <a:ext cx="0" cy="5392210"/>
           </a:xfrm>
           <a:prstGeom prst="line">
             <a:avLst/>
@@ -35767,13 +36067,15 @@
               </a:ext>
             </a:extLst>
           </p:cNvPr>
-          <p:cNvCxnSpPr/>
+          <p:cNvCxnSpPr>
+            <a:cxnSpLocks/>
+          </p:cNvCxnSpPr>
           <p:nvPr/>
         </p:nvCxnSpPr>
         <p:spPr>
           <a:xfrm>
-            <a:off x="11097768" y="1819656"/>
-            <a:ext cx="0" cy="5154466"/>
+            <a:off x="11097768" y="1581912"/>
+            <a:ext cx="0" cy="5392210"/>
           </a:xfrm>
           <a:prstGeom prst="line">
             <a:avLst/>
@@ -35816,6 +36118,178 @@
         <p:spPr>
           <a:xfrm>
             <a:off x="714373" y="6974122"/>
+            <a:ext cx="10383395" cy="0"/>
+          </a:xfrm>
+          <a:prstGeom prst="line">
+            <a:avLst/>
+          </a:prstGeom>
+          <a:ln>
+            <a:solidFill>
+              <a:schemeClr val="bg1"/>
+            </a:solidFill>
+          </a:ln>
+        </p:spPr>
+        <p:style>
+          <a:lnRef idx="1">
+            <a:schemeClr val="accent1"/>
+          </a:lnRef>
+          <a:fillRef idx="0">
+            <a:schemeClr val="accent1"/>
+          </a:fillRef>
+          <a:effectRef idx="0">
+            <a:schemeClr val="accent1"/>
+          </a:effectRef>
+          <a:fontRef idx="minor">
+            <a:schemeClr val="tx1"/>
+          </a:fontRef>
+        </p:style>
+      </p:cxnSp>
+      <p:cxnSp>
+        <p:nvCxnSpPr>
+          <p:cNvPr id="12" name="Прямая соединительная линия 11">
+            <a:extLst>
+              <a:ext uri="{FF2B5EF4-FFF2-40B4-BE49-F238E27FC236}">
+                <a16:creationId xmlns:a16="http://schemas.microsoft.com/office/drawing/2014/main" id="{D827108B-C9D5-425F-A7DE-F04751A8120D}"/>
+              </a:ext>
+            </a:extLst>
+          </p:cNvPr>
+          <p:cNvCxnSpPr>
+            <a:cxnSpLocks/>
+          </p:cNvCxnSpPr>
+          <p:nvPr/>
+        </p:nvCxnSpPr>
+        <p:spPr>
+          <a:xfrm>
+            <a:off x="653795" y="2386577"/>
+            <a:ext cx="13245085" cy="0"/>
+          </a:xfrm>
+          <a:prstGeom prst="line">
+            <a:avLst/>
+          </a:prstGeom>
+          <a:ln>
+            <a:solidFill>
+              <a:schemeClr val="bg1"/>
+            </a:solidFill>
+          </a:ln>
+        </p:spPr>
+        <p:style>
+          <a:lnRef idx="1">
+            <a:schemeClr val="accent1"/>
+          </a:lnRef>
+          <a:fillRef idx="0">
+            <a:schemeClr val="accent1"/>
+          </a:fillRef>
+          <a:effectRef idx="0">
+            <a:schemeClr val="accent1"/>
+          </a:effectRef>
+          <a:fontRef idx="minor">
+            <a:schemeClr val="tx1"/>
+          </a:fontRef>
+        </p:style>
+      </p:cxnSp>
+      <p:cxnSp>
+        <p:nvCxnSpPr>
+          <p:cNvPr id="16" name="Прямая соединительная линия 15">
+            <a:extLst>
+              <a:ext uri="{FF2B5EF4-FFF2-40B4-BE49-F238E27FC236}">
+                <a16:creationId xmlns:a16="http://schemas.microsoft.com/office/drawing/2014/main" id="{F56C7119-9D23-4BE9-9F81-3F2AF6D0E0E0}"/>
+              </a:ext>
+            </a:extLst>
+          </p:cNvPr>
+          <p:cNvCxnSpPr>
+            <a:cxnSpLocks/>
+          </p:cNvCxnSpPr>
+          <p:nvPr/>
+        </p:nvCxnSpPr>
+        <p:spPr>
+          <a:xfrm>
+            <a:off x="714372" y="3587794"/>
+            <a:ext cx="12352403" cy="0"/>
+          </a:xfrm>
+          <a:prstGeom prst="line">
+            <a:avLst/>
+          </a:prstGeom>
+          <a:ln>
+            <a:solidFill>
+              <a:schemeClr val="bg1"/>
+            </a:solidFill>
+          </a:ln>
+        </p:spPr>
+        <p:style>
+          <a:lnRef idx="1">
+            <a:schemeClr val="accent1"/>
+          </a:lnRef>
+          <a:fillRef idx="0">
+            <a:schemeClr val="accent1"/>
+          </a:fillRef>
+          <a:effectRef idx="0">
+            <a:schemeClr val="accent1"/>
+          </a:effectRef>
+          <a:fontRef idx="minor">
+            <a:schemeClr val="tx1"/>
+          </a:fontRef>
+        </p:style>
+      </p:cxnSp>
+      <p:cxnSp>
+        <p:nvCxnSpPr>
+          <p:cNvPr id="18" name="Прямая соединительная линия 17">
+            <a:extLst>
+              <a:ext uri="{FF2B5EF4-FFF2-40B4-BE49-F238E27FC236}">
+                <a16:creationId xmlns:a16="http://schemas.microsoft.com/office/drawing/2014/main" id="{5E2577EA-7A73-4FCB-A6CB-91DA9DAEC2F8}"/>
+              </a:ext>
+            </a:extLst>
+          </p:cNvPr>
+          <p:cNvCxnSpPr>
+            <a:cxnSpLocks/>
+          </p:cNvCxnSpPr>
+          <p:nvPr/>
+        </p:nvCxnSpPr>
+        <p:spPr>
+          <a:xfrm>
+            <a:off x="796667" y="4721650"/>
+            <a:ext cx="12352403" cy="0"/>
+          </a:xfrm>
+          <a:prstGeom prst="line">
+            <a:avLst/>
+          </a:prstGeom>
+          <a:ln>
+            <a:solidFill>
+              <a:schemeClr val="bg1"/>
+            </a:solidFill>
+          </a:ln>
+        </p:spPr>
+        <p:style>
+          <a:lnRef idx="1">
+            <a:schemeClr val="accent1"/>
+          </a:lnRef>
+          <a:fillRef idx="0">
+            <a:schemeClr val="accent1"/>
+          </a:fillRef>
+          <a:effectRef idx="0">
+            <a:schemeClr val="accent1"/>
+          </a:effectRef>
+          <a:fontRef idx="minor">
+            <a:schemeClr val="tx1"/>
+          </a:fontRef>
+        </p:style>
+      </p:cxnSp>
+      <p:cxnSp>
+        <p:nvCxnSpPr>
+          <p:cNvPr id="19" name="Прямая соединительная линия 18">
+            <a:extLst>
+              <a:ext uri="{FF2B5EF4-FFF2-40B4-BE49-F238E27FC236}">
+                <a16:creationId xmlns:a16="http://schemas.microsoft.com/office/drawing/2014/main" id="{48E46F1B-61E7-46D9-80F6-A6DCEB7B7EF7}"/>
+              </a:ext>
+            </a:extLst>
+          </p:cNvPr>
+          <p:cNvCxnSpPr>
+            <a:cxnSpLocks/>
+          </p:cNvCxnSpPr>
+          <p:nvPr/>
+        </p:nvCxnSpPr>
+        <p:spPr>
+          <a:xfrm>
+            <a:off x="714373" y="6020098"/>
             <a:ext cx="12352403" cy="0"/>
           </a:xfrm>
           <a:prstGeom prst="line">
@@ -35850,7 +36324,7 @@
 </p:sld>
 </file>
 
-<file path=ppt/slides/slide5.xml><?xml version="1.0" encoding="utf-8"?>
+<file path=ppt/slides/slide6.xml><?xml version="1.0" encoding="utf-8"?>
 <p:sld xmlns:a="http://schemas.openxmlformats.org/drawingml/2006/main" xmlns:r="http://schemas.openxmlformats.org/officeDocument/2006/relationships" xmlns:p="http://schemas.openxmlformats.org/presentationml/2006/main">
   <p:cSld name="Slide 31">
     <p:bg>
@@ -35907,7 +36381,7 @@
           <a:p>
             <a:r>
               <a:rPr lang="ru-RU" dirty="0"/>
-              <a:t>Заключение и демонстрация</a:t>
+              <a:t>Заключение</a:t>
             </a:r>
           </a:p>
         </p:txBody>
@@ -35970,52 +36444,11 @@
               <a:buChar char="•"/>
             </a:pPr>
             <a:r>
-              <a:rPr lang="ru-RU" b="0" i="0" dirty="0">
+              <a:rPr lang="ru-RU" sz="3200" b="0" i="0" dirty="0">
                 <a:effectLst/>
                 <a:latin typeface="quote-cjk-patch"/>
               </a:rPr>
               <a:t>Разработан и протестирован прототип чат-бота ВКонтакте с ИИ-ассистентом</a:t>
-            </a:r>
-          </a:p>
-          <a:p>
-            <a:pPr algn="l">
-              <a:buFont typeface="Arial" panose="020B0604020202020204" pitchFamily="34" charset="0"/>
-              <a:buChar char="•"/>
-            </a:pPr>
-            <a:r>
-              <a:rPr lang="ru-RU" b="0" i="0" dirty="0">
-                <a:effectLst/>
-                <a:latin typeface="quote-cjk-patch"/>
-              </a:rPr>
-              <a:t>Интегрированы: </a:t>
-            </a:r>
-            <a:r>
-              <a:rPr lang="ru-RU" b="0" i="0" dirty="0" err="1">
-                <a:effectLst/>
-                <a:latin typeface="quote-cjk-patch"/>
-              </a:rPr>
-              <a:t>GigaChat</a:t>
-            </a:r>
-            <a:r>
-              <a:rPr lang="ru-RU" b="0" i="0" dirty="0">
-                <a:effectLst/>
-                <a:latin typeface="quote-cjk-patch"/>
-              </a:rPr>
-              <a:t>, RAG (</a:t>
-            </a:r>
-            <a:r>
-              <a:rPr lang="ru-RU" b="0" i="0" dirty="0" err="1">
-                <a:effectLst/>
-                <a:latin typeface="quote-cjk-patch"/>
-              </a:rPr>
-              <a:t>Chroma</a:t>
-            </a:r>
-            <a:r>
-              <a:rPr lang="ru-RU" b="0" i="0" dirty="0">
-                <a:effectLst/>
-                <a:latin typeface="quote-cjk-patch"/>
-              </a:rPr>
-              <a:t>), YOLOv8, эскалация по JSON</a:t>
             </a:r>
           </a:p>
         </p:txBody>
@@ -36083,11 +36516,11 @@
               <a:buChar char="•"/>
             </a:pPr>
             <a:r>
-              <a:rPr lang="ru-RU" b="0" i="0" dirty="0">
+              <a:rPr lang="ru-RU" sz="3200" b="0" i="0" dirty="0">
                 <a:effectLst/>
                 <a:latin typeface="quote-cjk-patch"/>
               </a:rPr>
-              <a:t>Автоматизация 74% типовых обращений</a:t>
+              <a:t>Автоматизация большинства типовых обращений</a:t>
             </a:r>
           </a:p>
           <a:p>
@@ -36096,28 +36529,12 @@
               <a:buChar char="•"/>
             </a:pPr>
             <a:r>
-              <a:rPr lang="ru-RU" b="0" i="0" dirty="0">
+              <a:rPr lang="ru-RU" sz="3200" b="0" i="0" dirty="0">
                 <a:effectLst/>
                 <a:latin typeface="quote-cjk-patch"/>
               </a:rPr>
               <a:t>Сокращение времени первого ответа с 3–8 минут до 2–3 секунд</a:t>
             </a:r>
-          </a:p>
-          <a:p>
-            <a:pPr algn="l">
-              <a:buFont typeface="Arial" panose="020B0604020202020204" pitchFamily="34" charset="0"/>
-              <a:buChar char="•"/>
-            </a:pPr>
-            <a:r>
-              <a:rPr lang="ru-RU" b="0" i="0" dirty="0">
-                <a:effectLst/>
-                <a:latin typeface="quote-cjk-patch"/>
-              </a:rPr>
-              <a:t>Круглосуточная доступность</a:t>
-            </a:r>
-          </a:p>
-          <a:p>
-            <a:endParaRPr lang="ru-RU" dirty="0"/>
           </a:p>
         </p:txBody>
       </p:sp>
@@ -36174,43 +36591,83 @@
             <p:ph type="body" sz="quarter" idx="23"/>
           </p:nvPr>
         </p:nvSpPr>
-        <p:spPr/>
+        <p:spPr>
+          <a:xfrm>
+            <a:off x="9500617" y="3416490"/>
+            <a:ext cx="3575304" cy="4656930"/>
+          </a:xfrm>
+        </p:spPr>
         <p:txBody>
           <a:bodyPr/>
           <a:lstStyle/>
           <a:p>
-            <a:pPr algn="l">
+            <a:pPr>
               <a:buFont typeface="Arial" panose="020B0604020202020204" pitchFamily="34" charset="0"/>
               <a:buChar char="•"/>
             </a:pPr>
             <a:r>
-              <a:rPr lang="ru-RU" b="0" i="0">
+              <a:rPr lang="ru-RU" sz="3200" b="0" i="0" dirty="0">
                 <a:effectLst/>
                 <a:latin typeface="quote-cjk-patch"/>
               </a:rPr>
-              <a:t>Персистентное хранение истории (Redis/SQLite)</a:t>
+              <a:t>Персистентное хранение истории (</a:t>
+            </a:r>
+            <a:r>
+              <a:rPr lang="ru-RU" sz="3200" b="0" i="0" dirty="0" err="1">
+                <a:effectLst/>
+                <a:latin typeface="quote-cjk-patch"/>
+              </a:rPr>
+              <a:t>Redis</a:t>
+            </a:r>
+            <a:r>
+              <a:rPr lang="ru-RU" sz="3200" b="0" i="0" dirty="0">
+                <a:effectLst/>
+                <a:latin typeface="quote-cjk-patch"/>
+              </a:rPr>
+              <a:t>/</a:t>
+            </a:r>
+            <a:r>
+              <a:rPr lang="ru-RU" sz="3200" b="0" i="0" dirty="0" err="1">
+                <a:effectLst/>
+                <a:latin typeface="quote-cjk-patch"/>
+              </a:rPr>
+              <a:t>SQLite</a:t>
+            </a:r>
+            <a:r>
+              <a:rPr lang="ru-RU" sz="3200" b="0" i="0" dirty="0">
+                <a:effectLst/>
+                <a:latin typeface="quote-cjk-patch"/>
+              </a:rPr>
+              <a:t>)</a:t>
             </a:r>
           </a:p>
           <a:p>
-            <a:pPr algn="l">
+            <a:pPr>
               <a:buFont typeface="Arial" panose="020B0604020202020204" pitchFamily="34" charset="0"/>
               <a:buChar char="•"/>
             </a:pPr>
             <a:r>
-              <a:rPr lang="ru-RU" b="0" i="0">
+              <a:rPr lang="ru-RU" sz="3200" b="0" i="0" dirty="0" err="1">
                 <a:effectLst/>
                 <a:latin typeface="quote-cjk-patch"/>
               </a:rPr>
-              <a:t>Webhook-интеграция с CRM</a:t>
+              <a:t>Webhook</a:t>
+            </a:r>
+            <a:r>
+              <a:rPr lang="ru-RU" sz="3200" b="0" i="0" dirty="0">
+                <a:effectLst/>
+                <a:latin typeface="quote-cjk-patch"/>
+              </a:rPr>
+              <a:t>-интеграция с CRM</a:t>
             </a:r>
           </a:p>
           <a:p>
-            <a:pPr algn="l">
+            <a:pPr>
               <a:buFont typeface="Arial" panose="020B0604020202020204" pitchFamily="34" charset="0"/>
               <a:buChar char="•"/>
             </a:pPr>
             <a:r>
-              <a:rPr lang="ru-RU" b="0" i="0">
+              <a:rPr lang="ru-RU" sz="3200" b="0" i="0" dirty="0">
                 <a:effectLst/>
                 <a:latin typeface="quote-cjk-patch"/>
               </a:rPr>
@@ -36221,10 +36678,124 @@
       </p:sp>
       <p:sp>
         <p:nvSpPr>
-          <p:cNvPr id="17" name="Текст 16">
-            <a:extLst>
-              <a:ext uri="{FF2B5EF4-FFF2-40B4-BE49-F238E27FC236}">
-                <a16:creationId xmlns:a16="http://schemas.microsoft.com/office/drawing/2014/main" id="{1AA95ED3-F7AE-4D6C-9FB8-A519DF10ACA5}"/>
+          <p:cNvPr id="9" name="Прямоугольник 8">
+            <a:extLst>
+              <a:ext uri="{FF2B5EF4-FFF2-40B4-BE49-F238E27FC236}">
+                <a16:creationId xmlns:a16="http://schemas.microsoft.com/office/drawing/2014/main" id="{869A0E77-6BF3-4DDE-8CF5-55D7357EFA8F}"/>
+              </a:ext>
+            </a:extLst>
+          </p:cNvPr>
+          <p:cNvSpPr/>
+          <p:nvPr/>
+        </p:nvSpPr>
+        <p:spPr>
+          <a:xfrm>
+            <a:off x="13482735" y="1707502"/>
+            <a:ext cx="4394718" cy="6848669"/>
+          </a:xfrm>
+          <a:prstGeom prst="rect">
+            <a:avLst/>
+          </a:prstGeom>
+          <a:solidFill>
+            <a:srgbClr val="F8F8F8"/>
+          </a:solidFill>
+          <a:ln>
+            <a:solidFill>
+              <a:srgbClr val="F9F9F9"/>
+            </a:solidFill>
+          </a:ln>
+        </p:spPr>
+        <p:style>
+          <a:lnRef idx="2">
+            <a:schemeClr val="accent1">
+              <a:shade val="50000"/>
+            </a:schemeClr>
+          </a:lnRef>
+          <a:fillRef idx="1">
+            <a:schemeClr val="accent1"/>
+          </a:fillRef>
+          <a:effectRef idx="0">
+            <a:schemeClr val="accent1"/>
+          </a:effectRef>
+          <a:fontRef idx="minor">
+            <a:schemeClr val="lt1"/>
+          </a:fontRef>
+        </p:style>
+        <p:txBody>
+          <a:bodyPr rtlCol="0" anchor="ctr"/>
+          <a:lstStyle/>
+          <a:p>
+            <a:pPr algn="ctr"/>
+            <a:endParaRPr lang="ru-RU"/>
+          </a:p>
+        </p:txBody>
+      </p:sp>
+      <p:sp>
+        <p:nvSpPr>
+          <p:cNvPr id="18" name="TextBox 17">
+            <a:extLst>
+              <a:ext uri="{FF2B5EF4-FFF2-40B4-BE49-F238E27FC236}">
+                <a16:creationId xmlns:a16="http://schemas.microsoft.com/office/drawing/2014/main" id="{D536B865-30D0-4FDB-A30E-7E6AA3A26549}"/>
+              </a:ext>
+            </a:extLst>
+          </p:cNvPr>
+          <p:cNvSpPr txBox="1"/>
+          <p:nvPr/>
+        </p:nvSpPr>
+        <p:spPr>
+          <a:xfrm rot="1175335">
+            <a:off x="13264492" y="6525064"/>
+            <a:ext cx="436486" cy="1862048"/>
+          </a:xfrm>
+          <a:prstGeom prst="rect">
+            <a:avLst/>
+          </a:prstGeom>
+          <a:noFill/>
+        </p:spPr>
+        <p:txBody>
+          <a:bodyPr wrap="square">
+            <a:spAutoFit/>
+          </a:bodyPr>
+          <a:lstStyle/>
+          <a:p>
+            <a:r>
+              <a:rPr lang="ru-RU" sz="11500" dirty="0"/>
+              <a:t>🤔</a:t>
+            </a:r>
+          </a:p>
+        </p:txBody>
+      </p:sp>
+    </p:spTree>
+  </p:cSld>
+  <p:clrMapOvr>
+    <a:masterClrMapping/>
+  </p:clrMapOvr>
+</p:sld>
+</file>
+
+<file path=ppt/slides/slide7.xml><?xml version="1.0" encoding="utf-8"?>
+<p:sld xmlns:a="http://schemas.openxmlformats.org/drawingml/2006/main" xmlns:r="http://schemas.openxmlformats.org/officeDocument/2006/relationships" xmlns:p="http://schemas.openxmlformats.org/presentationml/2006/main">
+  <p:cSld>
+    <p:spTree>
+      <p:nvGrpSpPr>
+        <p:cNvPr id="1" name=""/>
+        <p:cNvGrpSpPr/>
+        <p:nvPr/>
+      </p:nvGrpSpPr>
+      <p:grpSpPr>
+        <a:xfrm>
+          <a:off x="0" y="0"/>
+          <a:ext cx="0" cy="0"/>
+          <a:chOff x="0" y="0"/>
+          <a:chExt cx="0" cy="0"/>
+        </a:xfrm>
+      </p:grpSpPr>
+      <p:sp>
+        <p:nvSpPr>
+          <p:cNvPr id="11" name="Заголовок 10">
+            <a:extLst>
+              <a:ext uri="{FF2B5EF4-FFF2-40B4-BE49-F238E27FC236}">
+                <a16:creationId xmlns:a16="http://schemas.microsoft.com/office/drawing/2014/main" id="{2E94BC98-DC63-43D0-B50A-0001AB2F271B}"/>
               </a:ext>
             </a:extLst>
           </p:cNvPr>
@@ -36232,7 +36803,7 @@
             <a:spLocks noGrp="1"/>
           </p:cNvSpPr>
           <p:nvPr>
-            <p:ph type="body" sz="quarter" idx="24"/>
+            <p:ph type="title"/>
           </p:nvPr>
         </p:nvSpPr>
         <p:spPr/>
@@ -36242,17 +36813,17 @@
           <a:p>
             <a:r>
               <a:rPr lang="ru-RU" dirty="0"/>
-              <a:t>Пример</a:t>
+              <a:t>Демонстрация</a:t>
             </a:r>
           </a:p>
         </p:txBody>
       </p:sp>
       <p:pic>
         <p:nvPicPr>
-          <p:cNvPr id="8" name="Рисунок 7">
-            <a:extLst>
-              <a:ext uri="{FF2B5EF4-FFF2-40B4-BE49-F238E27FC236}">
-                <a16:creationId xmlns:a16="http://schemas.microsoft.com/office/drawing/2014/main" id="{4B8315F0-F386-4114-9F36-DB5F2CCA9B37}"/>
+          <p:cNvPr id="15" name="Рисунок 14">
+            <a:extLst>
+              <a:ext uri="{FF2B5EF4-FFF2-40B4-BE49-F238E27FC236}">
+                <a16:creationId xmlns:a16="http://schemas.microsoft.com/office/drawing/2014/main" id="{D4967589-178E-4B66-B960-E9D2A3450B50}"/>
               </a:ext>
             </a:extLst>
           </p:cNvPr>
@@ -36262,22 +36833,63 @@
           <p:nvPr/>
         </p:nvPicPr>
         <p:blipFill>
-          <a:blip r:embed="rId3"/>
+          <a:blip r:embed="rId2"/>
           <a:stretch>
             <a:fillRect/>
           </a:stretch>
         </p:blipFill>
         <p:spPr>
           <a:xfrm>
-            <a:off x="13766008" y="3143440"/>
-            <a:ext cx="3662455" cy="5059941"/>
+            <a:off x="5890429" y="783364"/>
+            <a:ext cx="6071416" cy="8781868"/>
           </a:xfrm>
           <a:prstGeom prst="rect">
             <a:avLst/>
           </a:prstGeom>
         </p:spPr>
       </p:pic>
+      <p:sp>
+        <p:nvSpPr>
+          <p:cNvPr id="16" name="TextBox 15">
+            <a:extLst>
+              <a:ext uri="{FF2B5EF4-FFF2-40B4-BE49-F238E27FC236}">
+                <a16:creationId xmlns:a16="http://schemas.microsoft.com/office/drawing/2014/main" id="{50CB2DF7-7E6F-4CEF-BAB8-3B6BF73ED254}"/>
+              </a:ext>
+            </a:extLst>
+          </p:cNvPr>
+          <p:cNvSpPr txBox="1"/>
+          <p:nvPr/>
+        </p:nvSpPr>
+        <p:spPr>
+          <a:xfrm>
+            <a:off x="11219688" y="8924544"/>
+            <a:ext cx="888385" cy="707886"/>
+          </a:xfrm>
+          <a:prstGeom prst="rect">
+            <a:avLst/>
+          </a:prstGeom>
+          <a:noFill/>
+        </p:spPr>
+        <p:txBody>
+          <a:bodyPr wrap="none" rtlCol="0">
+            <a:spAutoFit/>
+          </a:bodyPr>
+          <a:lstStyle/>
+          <a:p>
+            <a:r>
+              <a:rPr lang="en-US" sz="4000" dirty="0"/>
+              <a:t>😺</a:t>
+            </a:r>
+            <a:endParaRPr lang="ru-RU" sz="4000" dirty="0"/>
+          </a:p>
+        </p:txBody>
+      </p:sp>
     </p:spTree>
+    <p:extLst>
+      <p:ext uri="{BB962C8B-B14F-4D97-AF65-F5344CB8AC3E}">
+        <p14:creationId xmlns:p14="http://schemas.microsoft.com/office/powerpoint/2010/main" val="3850010081"/>
+      </p:ext>
+    </p:extLst>
   </p:cSld>
   <p:clrMapOvr>
     <a:masterClrMapping/>

--- a/преза.pptx
+++ b/преза.pptx
@@ -34869,6 +34869,190 @@
           </a:p>
         </p:txBody>
       </p:sp>
+      <p:pic>
+        <p:nvPicPr>
+          <p:cNvPr id="1026" name="Picture 2" descr="VK (компания) — Википедия">
+            <a:extLst>
+              <a:ext uri="{FF2B5EF4-FFF2-40B4-BE49-F238E27FC236}">
+                <a16:creationId xmlns:a16="http://schemas.microsoft.com/office/drawing/2014/main" id="{23E6E8E2-82E1-413B-9B48-6D93139E475D}"/>
+              </a:ext>
+            </a:extLst>
+          </p:cNvPr>
+          <p:cNvPicPr>
+            <a:picLocks noChangeAspect="1" noChangeArrowheads="1"/>
+          </p:cNvPicPr>
+          <p:nvPr/>
+        </p:nvPicPr>
+        <p:blipFill>
+          <a:blip r:embed="rId5">
+            <a:extLst>
+              <a:ext uri="{28A0092B-C50C-407E-A947-70E740481C1C}">
+                <a14:useLocalDpi xmlns:a14="http://schemas.microsoft.com/office/drawing/2010/main" val="0"/>
+              </a:ext>
+            </a:extLst>
+          </a:blip>
+          <a:srcRect/>
+          <a:stretch>
+            <a:fillRect/>
+          </a:stretch>
+        </p:blipFill>
+        <p:spPr bwMode="auto">
+          <a:xfrm>
+            <a:off x="14374368" y="1860804"/>
+            <a:ext cx="2345436" cy="2345436"/>
+          </a:xfrm>
+          <a:prstGeom prst="rect">
+            <a:avLst/>
+          </a:prstGeom>
+          <a:noFill/>
+          <a:extLst>
+            <a:ext uri="{909E8E84-426E-40DD-AFC4-6F175D3DCCD1}">
+              <a14:hiddenFill xmlns:a14="http://schemas.microsoft.com/office/drawing/2010/main">
+                <a:solidFill>
+                  <a:srgbClr val="FFFFFF"/>
+                </a:solidFill>
+              </a14:hiddenFill>
+            </a:ext>
+          </a:extLst>
+        </p:spPr>
+      </p:pic>
+      <p:pic>
+        <p:nvPicPr>
+          <p:cNvPr id="1028" name="Picture 4" descr="Simple Design Robot Head Logo Robot: стоковая векторная графика (без  лицензионных платежей), 2575751581 | Shutterstock">
+            <a:extLst>
+              <a:ext uri="{FF2B5EF4-FFF2-40B4-BE49-F238E27FC236}">
+                <a16:creationId xmlns:a16="http://schemas.microsoft.com/office/drawing/2014/main" id="{2B9FCAAF-D072-4E03-842C-E88D2048EF1A}"/>
+              </a:ext>
+            </a:extLst>
+          </p:cNvPr>
+          <p:cNvPicPr>
+            <a:picLocks noChangeAspect="1" noChangeArrowheads="1"/>
+          </p:cNvPicPr>
+          <p:nvPr/>
+        </p:nvPicPr>
+        <p:blipFill rotWithShape="1">
+          <a:blip r:embed="rId6">
+            <a:extLst>
+              <a:ext uri="{28A0092B-C50C-407E-A947-70E740481C1C}">
+                <a14:useLocalDpi xmlns:a14="http://schemas.microsoft.com/office/drawing/2010/main" val="0"/>
+              </a:ext>
+            </a:extLst>
+          </a:blip>
+          <a:srcRect b="11040"/>
+          <a:stretch/>
+        </p:blipFill>
+        <p:spPr bwMode="auto">
+          <a:xfrm>
+            <a:off x="9789414" y="5558778"/>
+            <a:ext cx="2476500" cy="2345436"/>
+          </a:xfrm>
+          <a:prstGeom prst="rect">
+            <a:avLst/>
+          </a:prstGeom>
+          <a:noFill/>
+          <a:extLst>
+            <a:ext uri="{909E8E84-426E-40DD-AFC4-6F175D3DCCD1}">
+              <a14:hiddenFill xmlns:a14="http://schemas.microsoft.com/office/drawing/2010/main">
+                <a:solidFill>
+                  <a:srgbClr val="FFFFFF"/>
+                </a:solidFill>
+              </a14:hiddenFill>
+            </a:ext>
+          </a:extLst>
+        </p:spPr>
+      </p:pic>
+      <p:cxnSp>
+        <p:nvCxnSpPr>
+          <p:cNvPr id="5" name="Прямая со стрелкой 4">
+            <a:extLst>
+              <a:ext uri="{FF2B5EF4-FFF2-40B4-BE49-F238E27FC236}">
+                <a16:creationId xmlns:a16="http://schemas.microsoft.com/office/drawing/2014/main" id="{7CF07198-BA91-4AC9-85CA-51BD9FF24D63}"/>
+              </a:ext>
+            </a:extLst>
+          </p:cNvPr>
+          <p:cNvCxnSpPr>
+            <a:cxnSpLocks/>
+          </p:cNvCxnSpPr>
+          <p:nvPr/>
+        </p:nvCxnSpPr>
+        <p:spPr>
+          <a:xfrm flipV="1">
+            <a:off x="11027664" y="3033522"/>
+            <a:ext cx="3246120" cy="3111246"/>
+          </a:xfrm>
+          <a:prstGeom prst="bentConnector3">
+            <a:avLst>
+              <a:gd name="adj1" fmla="val 423"/>
+            </a:avLst>
+          </a:prstGeom>
+          <a:ln w="38100">
+            <a:solidFill>
+              <a:srgbClr val="000000"/>
+            </a:solidFill>
+            <a:tailEnd type="triangle"/>
+          </a:ln>
+        </p:spPr>
+        <p:style>
+          <a:lnRef idx="1">
+            <a:schemeClr val="accent1"/>
+          </a:lnRef>
+          <a:fillRef idx="0">
+            <a:schemeClr val="accent1"/>
+          </a:fillRef>
+          <a:effectRef idx="0">
+            <a:schemeClr val="accent1"/>
+          </a:effectRef>
+          <a:fontRef idx="minor">
+            <a:schemeClr val="tx1"/>
+          </a:fontRef>
+        </p:style>
+      </p:cxnSp>
+      <p:cxnSp>
+        <p:nvCxnSpPr>
+          <p:cNvPr id="13" name="Прямая со стрелкой 4">
+            <a:extLst>
+              <a:ext uri="{FF2B5EF4-FFF2-40B4-BE49-F238E27FC236}">
+                <a16:creationId xmlns:a16="http://schemas.microsoft.com/office/drawing/2014/main" id="{DB6E8EBF-4450-4A9A-BD52-D98410A9AF1F}"/>
+              </a:ext>
+            </a:extLst>
+          </p:cNvPr>
+          <p:cNvCxnSpPr>
+            <a:cxnSpLocks/>
+          </p:cNvCxnSpPr>
+          <p:nvPr/>
+        </p:nvCxnSpPr>
+        <p:spPr>
+          <a:xfrm rot="10800000" flipV="1">
+            <a:off x="11676888" y="4297680"/>
+            <a:ext cx="3870198" cy="2505456"/>
+          </a:xfrm>
+          <a:prstGeom prst="bentConnector3">
+            <a:avLst>
+              <a:gd name="adj1" fmla="val -325"/>
+            </a:avLst>
+          </a:prstGeom>
+          <a:ln w="38100">
+            <a:solidFill>
+              <a:srgbClr val="000000"/>
+            </a:solidFill>
+            <a:tailEnd type="triangle"/>
+          </a:ln>
+        </p:spPr>
+        <p:style>
+          <a:lnRef idx="1">
+            <a:schemeClr val="accent1"/>
+          </a:lnRef>
+          <a:fillRef idx="0">
+            <a:schemeClr val="accent1"/>
+          </a:fillRef>
+          <a:effectRef idx="0">
+            <a:schemeClr val="accent1"/>
+          </a:effectRef>
+          <a:fontRef idx="minor">
+            <a:schemeClr val="tx1"/>
+          </a:fontRef>
+        </p:style>
+      </p:cxnSp>
     </p:spTree>
   </p:cSld>
   <p:clrMapOvr>
@@ -35876,7 +36060,25 @@
                 </a:solidFill>
                 <a:latin typeface="Nunito SemiBold" pitchFamily="2" charset="-52"/>
               </a:rPr>
-              <a:t>Точность эскалации: 100% (13 нетиповых запросов)</a:t>
+              <a:t>Точность эскалации: </a:t>
+            </a:r>
+            <a:r>
+              <a:rPr lang="ru-RU" sz="2400" dirty="0">
+                <a:solidFill>
+                  <a:schemeClr val="bg1"/>
+                </a:solidFill>
+                <a:latin typeface="Nunito SemiBold" pitchFamily="2" charset="-52"/>
+              </a:rPr>
+              <a:t>100%</a:t>
+            </a:r>
+            <a:r>
+              <a:rPr lang="ru-RU" sz="2800" dirty="0">
+                <a:solidFill>
+                  <a:schemeClr val="bg1"/>
+                </a:solidFill>
+                <a:latin typeface="Nunito SemiBold" pitchFamily="2" charset="-52"/>
+              </a:rPr>
+              <a:t> (13 нетиповых запросов)</a:t>
             </a:r>
           </a:p>
           <a:p>
@@ -35915,7 +36117,7 @@
         <p:spPr>
           <a:xfrm>
             <a:off x="11183111" y="1758606"/>
-            <a:ext cx="3931919" cy="3724096"/>
+            <a:ext cx="3931919" cy="3970318"/>
           </a:xfrm>
           <a:prstGeom prst="rect">
             <a:avLst/>
@@ -35958,7 +36160,7 @@
             </a:r>
           </a:p>
           <a:p>
-            <a:endParaRPr lang="ru-RU" sz="4800" dirty="0">
+            <a:endParaRPr lang="ru-RU" sz="3200" dirty="0">
               <a:solidFill>
                 <a:schemeClr val="bg1"/>
               </a:solidFill>
@@ -35973,7 +36175,24 @@
                 </a:solidFill>
                 <a:latin typeface="Nunito SemiBold" pitchFamily="2" charset="-52"/>
               </a:rPr>
-              <a:t>Прямой LLM: ~2,1 с</a:t>
+              <a:t>Прямой LLM:</a:t>
+            </a:r>
+            <a:br>
+              <a:rPr lang="ru-RU" sz="2800" dirty="0">
+                <a:solidFill>
+                  <a:schemeClr val="bg1"/>
+                </a:solidFill>
+                <a:latin typeface="Nunito SemiBold" pitchFamily="2" charset="-52"/>
+              </a:rPr>
+            </a:br>
+            <a:r>
+              <a:rPr lang="ru-RU" sz="2800" dirty="0">
+                <a:solidFill>
+                  <a:schemeClr val="bg1"/>
+                </a:solidFill>
+                <a:latin typeface="Nunito SemiBold" pitchFamily="2" charset="-52"/>
+              </a:rPr>
+              <a:t>~2,1 с</a:t>
             </a:r>
           </a:p>
           <a:p>
@@ -36117,8 +36336,8 @@
         </p:nvCxnSpPr>
         <p:spPr>
           <a:xfrm>
-            <a:off x="714373" y="6974122"/>
-            <a:ext cx="10383395" cy="0"/>
+            <a:off x="653795" y="6974122"/>
+            <a:ext cx="10443973" cy="0"/>
           </a:xfrm>
           <a:prstGeom prst="line">
             <a:avLst/>
@@ -36203,8 +36422,8 @@
         </p:nvCxnSpPr>
         <p:spPr>
           <a:xfrm>
-            <a:off x="714372" y="3587794"/>
-            <a:ext cx="12352403" cy="0"/>
+            <a:off x="665987" y="3587794"/>
+            <a:ext cx="13232893" cy="0"/>
           </a:xfrm>
           <a:prstGeom prst="line">
             <a:avLst/>
@@ -36246,8 +36465,8 @@
         </p:nvCxnSpPr>
         <p:spPr>
           <a:xfrm>
-            <a:off x="796667" y="4721650"/>
-            <a:ext cx="12352403" cy="0"/>
+            <a:off x="665987" y="4721650"/>
+            <a:ext cx="13232893" cy="0"/>
           </a:xfrm>
           <a:prstGeom prst="line">
             <a:avLst/>
@@ -36289,8 +36508,94 @@
         </p:nvCxnSpPr>
         <p:spPr>
           <a:xfrm>
-            <a:off x="714373" y="6020098"/>
-            <a:ext cx="12352403" cy="0"/>
+            <a:off x="665987" y="6020098"/>
+            <a:ext cx="13232893" cy="0"/>
+          </a:xfrm>
+          <a:prstGeom prst="line">
+            <a:avLst/>
+          </a:prstGeom>
+          <a:ln>
+            <a:solidFill>
+              <a:schemeClr val="bg1"/>
+            </a:solidFill>
+          </a:ln>
+        </p:spPr>
+        <p:style>
+          <a:lnRef idx="1">
+            <a:schemeClr val="accent1"/>
+          </a:lnRef>
+          <a:fillRef idx="0">
+            <a:schemeClr val="accent1"/>
+          </a:fillRef>
+          <a:effectRef idx="0">
+            <a:schemeClr val="accent1"/>
+          </a:effectRef>
+          <a:fontRef idx="minor">
+            <a:schemeClr val="tx1"/>
+          </a:fontRef>
+        </p:style>
+      </p:cxnSp>
+      <p:cxnSp>
+        <p:nvCxnSpPr>
+          <p:cNvPr id="20" name="Прямая соединительная линия 19">
+            <a:extLst>
+              <a:ext uri="{FF2B5EF4-FFF2-40B4-BE49-F238E27FC236}">
+                <a16:creationId xmlns:a16="http://schemas.microsoft.com/office/drawing/2014/main" id="{7321BB5F-84DA-4E4F-A564-717E9199732B}"/>
+              </a:ext>
+            </a:extLst>
+          </p:cNvPr>
+          <p:cNvCxnSpPr>
+            <a:cxnSpLocks/>
+          </p:cNvCxnSpPr>
+          <p:nvPr/>
+        </p:nvCxnSpPr>
+        <p:spPr>
+          <a:xfrm>
+            <a:off x="13898880" y="1581912"/>
+            <a:ext cx="0" cy="4438186"/>
+          </a:xfrm>
+          <a:prstGeom prst="line">
+            <a:avLst/>
+          </a:prstGeom>
+          <a:ln>
+            <a:solidFill>
+              <a:schemeClr val="bg1"/>
+            </a:solidFill>
+          </a:ln>
+        </p:spPr>
+        <p:style>
+          <a:lnRef idx="1">
+            <a:schemeClr val="accent1"/>
+          </a:lnRef>
+          <a:fillRef idx="0">
+            <a:schemeClr val="accent1"/>
+          </a:fillRef>
+          <a:effectRef idx="0">
+            <a:schemeClr val="accent1"/>
+          </a:effectRef>
+          <a:fontRef idx="minor">
+            <a:schemeClr val="tx1"/>
+          </a:fontRef>
+        </p:style>
+      </p:cxnSp>
+      <p:cxnSp>
+        <p:nvCxnSpPr>
+          <p:cNvPr id="21" name="Прямая соединительная линия 20">
+            <a:extLst>
+              <a:ext uri="{FF2B5EF4-FFF2-40B4-BE49-F238E27FC236}">
+                <a16:creationId xmlns:a16="http://schemas.microsoft.com/office/drawing/2014/main" id="{0274D361-A8F5-4979-AB6D-159A517A43B4}"/>
+              </a:ext>
+            </a:extLst>
+          </p:cNvPr>
+          <p:cNvCxnSpPr>
+            <a:cxnSpLocks/>
+          </p:cNvCxnSpPr>
+          <p:nvPr/>
+        </p:nvCxnSpPr>
+        <p:spPr>
+          <a:xfrm>
+            <a:off x="665987" y="1581912"/>
+            <a:ext cx="0" cy="5392210"/>
           </a:xfrm>
           <a:prstGeom prst="line">
             <a:avLst/>
